--- a/Slides/CSC6032/Advanced-OS-04-Process & Thread.pptx
+++ b/Slides/CSC6032/Advanced-OS-04-Process & Thread.pptx
@@ -251,7 +251,7 @@
           <a:p>
             <a:fld id="{3C1F4A7B-8284-4E61-88F9-84C6CA6E31E8}" type="datetimeFigureOut">
               <a:rPr lang="zh-TW" altLang="en-US" smtClean="0"/>
-              <a:t>2024/7/19</a:t>
+              <a:t>2026/9/21</a:t>
             </a:fld>
             <a:endParaRPr lang="zh-TW" altLang="en-US"/>
           </a:p>
@@ -11178,6 +11178,8 @@
                     </a:srgbClr>
                   </a:outerShdw>
                 </a:effectLst>
+                <a:latin typeface="Times New Roman" panose="02020603050405020304" pitchFamily="18" charset="0"/>
+                <a:cs typeface="Times New Roman" panose="02020603050405020304" pitchFamily="18" charset="0"/>
               </a:rPr>
               <a:t>CSC</a:t>
             </a:r>
@@ -11190,6 +11192,8 @@
                     </a:srgbClr>
                   </a:outerShdw>
                 </a:effectLst>
+                <a:latin typeface="Times New Roman" panose="02020603050405020304" pitchFamily="18" charset="0"/>
+                <a:cs typeface="Times New Roman" panose="02020603050405020304" pitchFamily="18" charset="0"/>
               </a:rPr>
               <a:t>6032</a:t>
             </a:r>
@@ -11202,6 +11206,8 @@
                     </a:srgbClr>
                   </a:outerShdw>
                 </a:effectLst>
+                <a:latin typeface="Times New Roman" panose="02020603050405020304" pitchFamily="18" charset="0"/>
+                <a:cs typeface="Times New Roman" panose="02020603050405020304" pitchFamily="18" charset="0"/>
               </a:rPr>
               <a:t> – Advanced Operating Systems</a:t>
             </a:r>
@@ -11213,6 +11219,8 @@
                   </a:srgbClr>
                 </a:outerShdw>
               </a:effectLst>
+              <a:latin typeface="Times New Roman" panose="02020603050405020304" pitchFamily="18" charset="0"/>
+              <a:cs typeface="Times New Roman" panose="02020603050405020304" pitchFamily="18" charset="0"/>
             </a:endParaRPr>
           </a:p>
         </p:txBody>
@@ -11246,6 +11254,8 @@
                     </a:srgbClr>
                   </a:outerShdw>
                 </a:effectLst>
+                <a:latin typeface="Times New Roman" panose="02020603050405020304" pitchFamily="18" charset="0"/>
+                <a:cs typeface="Times New Roman" panose="02020603050405020304" pitchFamily="18" charset="0"/>
               </a:rPr>
               <a:t>Prof. </a:t>
             </a:r>
@@ -11258,6 +11268,8 @@
                     </a:srgbClr>
                   </a:outerShdw>
                 </a:effectLst>
+                <a:latin typeface="Times New Roman" panose="02020603050405020304" pitchFamily="18" charset="0"/>
+                <a:cs typeface="Times New Roman" panose="02020603050405020304" pitchFamily="18" charset="0"/>
               </a:rPr>
               <a:t>Yeh-Ching</a:t>
             </a:r>
@@ -11270,6 +11282,8 @@
                     </a:srgbClr>
                   </a:outerShdw>
                 </a:effectLst>
+                <a:latin typeface="Times New Roman" panose="02020603050405020304" pitchFamily="18" charset="0"/>
+                <a:cs typeface="Times New Roman" panose="02020603050405020304" pitchFamily="18" charset="0"/>
               </a:rPr>
               <a:t> Chung</a:t>
             </a:r>
@@ -11283,25 +11297,39 @@
                   </a:srgbClr>
                 </a:outerShdw>
               </a:effectLst>
+              <a:latin typeface="Times New Roman" panose="02020603050405020304" pitchFamily="18" charset="0"/>
+              <a:cs typeface="Times New Roman" panose="02020603050405020304" pitchFamily="18" charset="0"/>
             </a:endParaRPr>
           </a:p>
           <a:p>
             <a:r>
-              <a:rPr lang="en-US" altLang="zh-TW" sz="3200" dirty="0"/>
+              <a:rPr lang="en-US" altLang="zh-TW" sz="3200" dirty="0">
+                <a:latin typeface="Times New Roman" panose="02020603050405020304" pitchFamily="18" charset="0"/>
+                <a:cs typeface="Times New Roman" panose="02020603050405020304" pitchFamily="18" charset="0"/>
+              </a:rPr>
               <a:t>School of </a:t>
             </a:r>
             <a:r>
-              <a:rPr lang="en-US" altLang="zh-CN" sz="3200" dirty="0"/>
+              <a:rPr lang="en-US" altLang="zh-CN" sz="3200" dirty="0">
+                <a:latin typeface="Times New Roman" panose="02020603050405020304" pitchFamily="18" charset="0"/>
+                <a:cs typeface="Times New Roman" panose="02020603050405020304" pitchFamily="18" charset="0"/>
+              </a:rPr>
               <a:t>Data </a:t>
             </a:r>
             <a:r>
-              <a:rPr lang="en-US" altLang="zh-TW" sz="3200" dirty="0"/>
+              <a:rPr lang="en-US" altLang="zh-TW" sz="3200" dirty="0">
+                <a:latin typeface="Times New Roman" panose="02020603050405020304" pitchFamily="18" charset="0"/>
+                <a:cs typeface="Times New Roman" panose="02020603050405020304" pitchFamily="18" charset="0"/>
+              </a:rPr>
               <a:t>Science</a:t>
             </a:r>
           </a:p>
           <a:p>
             <a:r>
-              <a:rPr lang="en-US" altLang="zh-TW" sz="3200" dirty="0"/>
+              <a:rPr lang="en-US" altLang="zh-TW" sz="3200" dirty="0">
+                <a:latin typeface="Times New Roman" panose="02020603050405020304" pitchFamily="18" charset="0"/>
+                <a:cs typeface="Times New Roman" panose="02020603050405020304" pitchFamily="18" charset="0"/>
+              </a:rPr>
               <a:t>Chinese University of Hong Kong, Shenzhen</a:t>
             </a:r>
           </a:p>
@@ -13888,22 +13916,22 @@
         </p:nvSpPr>
         <p:spPr>
           <a:xfrm>
-            <a:off x="1005840" y="187890"/>
-            <a:ext cx="9309353" cy="597391"/>
-          </a:xfrm>
-        </p:spPr>
-        <p:txBody>
-          <a:bodyPr/>
-          <a:lstStyle/>
-          <a:p>
-            <a:r>
-              <a:rPr lang="en-US" altLang="zh-CN" sz="3600" dirty="0">
+            <a:off x="1168400" y="187890"/>
+            <a:ext cx="9146793" cy="597391"/>
+          </a:xfrm>
+        </p:spPr>
+        <p:txBody>
+          <a:bodyPr/>
+          <a:lstStyle/>
+          <a:p>
+            <a:r>
+              <a:rPr lang="en-US" altLang="zh-CN" sz="4000" dirty="0">
                 <a:latin typeface="Times New Roman" panose="02020603050405020304" pitchFamily="18" charset="0"/>
                 <a:cs typeface="Times New Roman" panose="02020603050405020304" pitchFamily="18" charset="0"/>
               </a:rPr>
               <a:t>Programming with Shared Memory</a:t>
             </a:r>
-            <a:endParaRPr lang="zh-TW" altLang="en-US" sz="3600" dirty="0">
+            <a:endParaRPr lang="zh-TW" altLang="en-US" sz="4000" dirty="0">
               <a:latin typeface="Times New Roman" panose="02020603050405020304" pitchFamily="18" charset="0"/>
               <a:cs typeface="Times New Roman" panose="02020603050405020304" pitchFamily="18" charset="0"/>
             </a:endParaRPr>

--- a/Slides/CSC6032/Advanced-OS-04-Process & Thread.pptx
+++ b/Slides/CSC6032/Advanced-OS-04-Process & Thread.pptx
@@ -251,7 +251,7 @@
           <a:p>
             <a:fld id="{3C1F4A7B-8284-4E61-88F9-84C6CA6E31E8}" type="datetimeFigureOut">
               <a:rPr lang="zh-TW" altLang="en-US" smtClean="0"/>
-              <a:t>2026/9/21</a:t>
+              <a:t>2026/9/28</a:t>
             </a:fld>
             <a:endParaRPr lang="zh-TW" altLang="en-US"/>
           </a:p>
@@ -11210,6 +11210,47 @@
                 <a:cs typeface="Times New Roman" panose="02020603050405020304" pitchFamily="18" charset="0"/>
               </a:rPr>
               <a:t> – Advanced Operating Systems</a:t>
+            </a:r>
+            <a:br>
+              <a:rPr lang="en-US" altLang="zh-TW" sz="4800" dirty="0">
+                <a:effectLst>
+                  <a:outerShdw blurRad="38100" dist="38100" dir="2700000" algn="tl">
+                    <a:srgbClr val="000000">
+                      <a:alpha val="43137"/>
+                    </a:srgbClr>
+                  </a:outerShdw>
+                </a:effectLst>
+                <a:latin typeface="Times New Roman" panose="02020603050405020304" pitchFamily="18" charset="0"/>
+                <a:cs typeface="Times New Roman" panose="02020603050405020304" pitchFamily="18" charset="0"/>
+              </a:rPr>
+            </a:br>
+            <a:r>
+              <a:rPr lang="en-US" altLang="zh-CN" sz="4800" dirty="0">
+                <a:effectLst>
+                  <a:outerShdw blurRad="38100" dist="38100" dir="2700000" algn="tl">
+                    <a:srgbClr val="000000">
+                      <a:alpha val="43137"/>
+                    </a:srgbClr>
+                  </a:outerShdw>
+                </a:effectLst>
+                <a:latin typeface="Times New Roman" panose="02020603050405020304" pitchFamily="18" charset="0"/>
+                <a:cs typeface="Times New Roman" panose="02020603050405020304" pitchFamily="18" charset="0"/>
+              </a:rPr>
+              <a:t>Process </a:t>
+            </a:r>
+            <a:r>
+              <a:rPr lang="en-US" altLang="zh-CN" sz="4800">
+                <a:effectLst>
+                  <a:outerShdw blurRad="38100" dist="38100" dir="2700000" algn="tl">
+                    <a:srgbClr val="000000">
+                      <a:alpha val="43137"/>
+                    </a:srgbClr>
+                  </a:outerShdw>
+                </a:effectLst>
+                <a:latin typeface="Times New Roman" panose="02020603050405020304" pitchFamily="18" charset="0"/>
+                <a:cs typeface="Times New Roman" panose="02020603050405020304" pitchFamily="18" charset="0"/>
+              </a:rPr>
+              <a:t>&amp; Thread</a:t>
             </a:r>
             <a:endParaRPr lang="zh-TW" altLang="en-US" sz="4800" dirty="0">
               <a:effectLst>
